--- a/10-Knowledge-Products/KP4-DSD/videos/module_2/en/decks/KP4_M2_Deck_v0.1.pptx
+++ b/10-Knowledge-Products/KP4-DSD/videos/module_2/en/decks/KP4_M2_Deck_v0.1.pptx
@@ -4400,7 +4400,7 @@
           <a:p/>
           <a:p>
             <a:r>
-              <a:t>Slide specification: The drawn architecture is figure F7 of the written guide; the slide stays text-only, with plain-text boxes at most.</a:t>
+              <a:t>Slide specification: Figure F7, its slide variant (figures/slides/F7_architecture.png, drawn by the figure's own program in slide mode): the two applications on their own installations, the identity block over both, the Payments block beside PHEQA's, and the one crossing between the bodies through Linkup; boxes, arrows and words only, no imagery and no person on screen. The rows are its text equivalent. Calibration item: a drawn figure under ITU's text-only rule.</a:t>
             </a:r>
           </a:p>
         </p:txBody>
@@ -4926,7 +4926,7 @@
           <a:p/>
           <a:p>
             <a:r>
-              <a:t>Slide specification: Progressa's names as the plan gives them. No logos, no emblems.</a:t>
+              <a:t>Slide specification: Figure F5, its slide variant (figures/slides/F5_sector-catalogue.png, drawn by the figure's own program in slide mode): the catalogue as a table, the seven services and the bodies that owe them with a column for each shared block and the register's column picked out, so that slide 4 can be read down a column; Progressa's names as the plan gives them, no logos, no emblems; boxes, arrows and words only, no imagery and no person on screen. The rows are its text equivalent. Calibration item: a drawn figure under ITU's text-only rule.</a:t>
             </a:r>
           </a:p>
         </p:txBody>
@@ -28830,214 +28830,33 @@
           </a:p>
         </p:txBody>
       </p:sp>
-      <p:sp>
-        <p:nvSpPr>
-          <p:cNvPr id="4" name="TextBox 3"/>
-          <p:cNvSpPr txBox="1"/>
-          <p:nvPr/>
-        </p:nvSpPr>
-        <p:spPr>
-          <a:xfrm>
-            <a:off x="658368" y="1463040"/>
-            <a:ext cx="10984687" cy="1005839"/>
-          </a:xfrm>
-          <a:prstGeom prst="rect">
-            <a:avLst/>
-          </a:prstGeom>
-          <a:noFill/>
-        </p:spPr>
-        <p:txBody>
-          <a:bodyPr wrap="square">
-            <a:spAutoFit/>
-          </a:bodyPr>
-          <a:lstStyle/>
-          <a:p>
-            <a:pPr>
-              <a:spcAft>
-                <a:spcPts val="300"/>
-              </a:spcAft>
-            </a:pPr>
-            <a:r>
-              <a:rPr sz="2000" b="1" i="0">
-                <a:solidFill>
-                  <a:srgbClr val="1A1A1A"/>
-                </a:solidFill>
-                <a:latin typeface="Arial"/>
-              </a:rPr>
-              <a:t>PHEQA's application: its own installation of the low-code platform; keeps and writes the register of institutions.</a:t>
-            </a:r>
-          </a:p>
-        </p:txBody>
-      </p:sp>
-      <p:sp>
-        <p:nvSpPr>
-          <p:cNvPr id="5" name="Rectangle 4"/>
-          <p:cNvSpPr/>
-          <p:nvPr/>
-        </p:nvSpPr>
-        <p:spPr>
-          <a:xfrm>
-            <a:off x="621792" y="2473452"/>
-            <a:ext cx="10881360" cy="12700"/>
-          </a:xfrm>
-          <a:prstGeom prst="rect">
-            <a:avLst/>
-          </a:prstGeom>
-          <a:solidFill>
-            <a:srgbClr val="DDECF4"/>
-          </a:solidFill>
-          <a:ln>
-            <a:noFill/>
-          </a:ln>
-          <a:effectLst/>
-        </p:spPr>
-        <p:style>
-          <a:lnRef idx="1">
-            <a:schemeClr val="accent1"/>
-          </a:lnRef>
-          <a:fillRef idx="3">
-            <a:schemeClr val="accent1"/>
-          </a:fillRef>
-          <a:effectRef idx="2">
-            <a:schemeClr val="accent1"/>
-          </a:effectRef>
-          <a:fontRef idx="minor">
-            <a:schemeClr val="lt1"/>
-          </a:fontRef>
-        </p:style>
-        <p:txBody>
-          <a:bodyPr rtlCol="0" anchor="ctr"/>
-          <a:lstStyle/>
-          <a:p>
-            <a:pPr algn="ctr"/>
-          </a:p>
-        </p:txBody>
-      </p:sp>
-      <p:sp>
-        <p:nvSpPr>
-          <p:cNvPr id="6" name="TextBox 5"/>
-          <p:cNvSpPr txBox="1"/>
-          <p:nvPr/>
-        </p:nvSpPr>
-        <p:spPr>
-          <a:xfrm>
-            <a:off x="658368" y="2514600"/>
-            <a:ext cx="10984687" cy="1005839"/>
-          </a:xfrm>
-          <a:prstGeom prst="rect">
-            <a:avLst/>
-          </a:prstGeom>
-          <a:noFill/>
-        </p:spPr>
-        <p:txBody>
-          <a:bodyPr wrap="square">
-            <a:spAutoFit/>
-          </a:bodyPr>
-          <a:lstStyle/>
-          <a:p>
-            <a:pPr>
-              <a:spcAft>
-                <a:spcPts val="300"/>
-              </a:spcAft>
-            </a:pPr>
-            <a:r>
-              <a:rPr sz="2000" b="1" i="0">
-                <a:solidFill>
-                  <a:srgbClr val="1A1A1A"/>
-                </a:solidFill>
-                <a:latin typeface="Arial"/>
-              </a:rPr>
-              <a:t>MoEYS's application: its own installation; no copy of the register.</a:t>
-            </a:r>
-          </a:p>
-        </p:txBody>
-      </p:sp>
-      <p:sp>
-        <p:nvSpPr>
-          <p:cNvPr id="7" name="Rectangle 6"/>
-          <p:cNvSpPr/>
-          <p:nvPr/>
-        </p:nvSpPr>
-        <p:spPr>
-          <a:xfrm>
-            <a:off x="621792" y="3525012"/>
-            <a:ext cx="10881360" cy="12700"/>
-          </a:xfrm>
-          <a:prstGeom prst="rect">
-            <a:avLst/>
-          </a:prstGeom>
-          <a:solidFill>
-            <a:srgbClr val="DDECF4"/>
-          </a:solidFill>
-          <a:ln>
-            <a:noFill/>
-          </a:ln>
-          <a:effectLst/>
-        </p:spPr>
-        <p:style>
-          <a:lnRef idx="1">
-            <a:schemeClr val="accent1"/>
-          </a:lnRef>
-          <a:fillRef idx="3">
-            <a:schemeClr val="accent1"/>
-          </a:fillRef>
-          <a:effectRef idx="2">
-            <a:schemeClr val="accent1"/>
-          </a:effectRef>
-          <a:fontRef idx="minor">
-            <a:schemeClr val="lt1"/>
-          </a:fontRef>
-        </p:style>
-        <p:txBody>
-          <a:bodyPr rtlCol="0" anchor="ctr"/>
-          <a:lstStyle/>
-          <a:p>
-            <a:pPr algn="ctr"/>
-          </a:p>
-        </p:txBody>
-      </p:sp>
-      <p:sp>
-        <p:nvSpPr>
-          <p:cNvPr id="8" name="TextBox 7"/>
-          <p:cNvSpPr txBox="1"/>
-          <p:nvPr/>
-        </p:nvSpPr>
-        <p:spPr>
-          <a:xfrm>
-            <a:off x="658368" y="3566160"/>
-            <a:ext cx="10984687" cy="1005839"/>
-          </a:xfrm>
-          <a:prstGeom prst="rect">
-            <a:avLst/>
-          </a:prstGeom>
-          <a:noFill/>
-        </p:spPr>
-        <p:txBody>
-          <a:bodyPr wrap="square">
-            <a:spAutoFit/>
-          </a:bodyPr>
-          <a:lstStyle/>
-          <a:p>
-            <a:pPr>
-              <a:spcAft>
-                <a:spcPts val="300"/>
-              </a:spcAft>
-            </a:pPr>
-            <a:r>
-              <a:rPr sz="2000" b="1" i="0">
-                <a:solidFill>
-                  <a:srgbClr val="1A1A1A"/>
-                </a:solidFill>
-                <a:latin typeface="Arial"/>
-              </a:rPr>
-              <a:t>Shared: PNIA's sign-in, Linkup, the Payments block.</a:t>
-            </a:r>
-          </a:p>
-        </p:txBody>
-      </p:sp>
-      <p:sp>
-        <p:nvSpPr>
-          <p:cNvPr id="9" name="TextBox 8"/>
+      <p:pic>
+        <p:nvPicPr>
+          <p:cNvPr id="4" name="kp4-figure F7" descr="F7_architecture.png"/>
+          <p:cNvPicPr>
+            <a:picLocks noChangeAspect="1"/>
+          </p:cNvPicPr>
+          <p:nvPr/>
+        </p:nvPicPr>
+        <p:blipFill>
+          <a:blip r:embed="rId2"/>
+          <a:stretch>
+            <a:fillRect/>
+          </a:stretch>
+        </p:blipFill>
+        <p:spPr>
+          <a:xfrm>
+            <a:off x="2498406" y="1280160"/>
+            <a:ext cx="7201283" cy="5074920"/>
+          </a:xfrm>
+          <a:prstGeom prst="rect">
+            <a:avLst/>
+          </a:prstGeom>
+        </p:spPr>
+      </p:pic>
+      <p:sp>
+        <p:nvSpPr>
+          <p:cNvPr id="5" name="TextBox 4"/>
           <p:cNvSpPr txBox="1"/>
           <p:nvPr/>
         </p:nvSpPr>
@@ -31011,658 +30830,33 @@
           </a:p>
         </p:txBody>
       </p:sp>
-      <p:sp>
-        <p:nvSpPr>
-          <p:cNvPr id="4" name="TextBox 3"/>
-          <p:cNvSpPr txBox="1"/>
-          <p:nvPr/>
-        </p:nvSpPr>
-        <p:spPr>
-          <a:xfrm>
-            <a:off x="658368" y="1463040"/>
-            <a:ext cx="10984687" cy="627017"/>
-          </a:xfrm>
-          <a:prstGeom prst="rect">
-            <a:avLst/>
-          </a:prstGeom>
-          <a:noFill/>
-        </p:spPr>
-        <p:txBody>
-          <a:bodyPr wrap="square">
-            <a:spAutoFit/>
-          </a:bodyPr>
-          <a:lstStyle/>
-          <a:p>
-            <a:pPr>
-              <a:spcAft>
-                <a:spcPts val="300"/>
-              </a:spcAft>
-            </a:pPr>
-            <a:r>
-              <a:rPr sz="1700" b="1" i="0">
-                <a:solidFill>
-                  <a:srgbClr val="1A1A1A"/>
-                </a:solidFill>
-                <a:latin typeface="Arial"/>
-              </a:rPr>
-              <a:t>Register an institution</a:t>
-            </a:r>
-          </a:p>
-          <a:p>
-            <a:pPr>
-              <a:spcAft>
-                <a:spcPts val="300"/>
-              </a:spcAft>
-            </a:pPr>
-            <a:r>
-              <a:rPr sz="1550" b="0" i="0">
-                <a:solidFill>
-                  <a:srgbClr val="595959"/>
-                </a:solidFill>
-                <a:latin typeface="Arial"/>
-              </a:rPr>
-              <a:t>PHEQA.</a:t>
-            </a:r>
-          </a:p>
-        </p:txBody>
-      </p:sp>
-      <p:sp>
-        <p:nvSpPr>
-          <p:cNvPr id="5" name="Rectangle 4"/>
-          <p:cNvSpPr/>
-          <p:nvPr/>
-        </p:nvSpPr>
-        <p:spPr>
-          <a:xfrm>
-            <a:off x="621792" y="2094629"/>
-            <a:ext cx="10881360" cy="12700"/>
-          </a:xfrm>
-          <a:prstGeom prst="rect">
-            <a:avLst/>
-          </a:prstGeom>
-          <a:solidFill>
-            <a:srgbClr val="DDECF4"/>
-          </a:solidFill>
-          <a:ln>
-            <a:noFill/>
-          </a:ln>
-          <a:effectLst/>
-        </p:spPr>
-        <p:style>
-          <a:lnRef idx="1">
-            <a:schemeClr val="accent1"/>
-          </a:lnRef>
-          <a:fillRef idx="3">
-            <a:schemeClr val="accent1"/>
-          </a:fillRef>
-          <a:effectRef idx="2">
-            <a:schemeClr val="accent1"/>
-          </a:effectRef>
-          <a:fontRef idx="minor">
-            <a:schemeClr val="lt1"/>
-          </a:fontRef>
-        </p:style>
-        <p:txBody>
-          <a:bodyPr rtlCol="0" anchor="ctr"/>
-          <a:lstStyle/>
-          <a:p>
-            <a:pPr algn="ctr"/>
-          </a:p>
-        </p:txBody>
-      </p:sp>
-      <p:sp>
-        <p:nvSpPr>
-          <p:cNvPr id="6" name="TextBox 5"/>
-          <p:cNvSpPr txBox="1"/>
-          <p:nvPr/>
-        </p:nvSpPr>
-        <p:spPr>
-          <a:xfrm>
-            <a:off x="658368" y="2135777"/>
-            <a:ext cx="10984687" cy="627017"/>
-          </a:xfrm>
-          <a:prstGeom prst="rect">
-            <a:avLst/>
-          </a:prstGeom>
-          <a:noFill/>
-        </p:spPr>
-        <p:txBody>
-          <a:bodyPr wrap="square">
-            <a:spAutoFit/>
-          </a:bodyPr>
-          <a:lstStyle/>
-          <a:p>
-            <a:pPr>
-              <a:spcAft>
-                <a:spcPts val="300"/>
-              </a:spcAft>
-            </a:pPr>
-            <a:r>
-              <a:rPr sz="1700" b="1" i="0">
-                <a:solidFill>
-                  <a:srgbClr val="1A1A1A"/>
-                </a:solidFill>
-                <a:latin typeface="Arial"/>
-              </a:rPr>
-              <a:t>License an institution</a:t>
-            </a:r>
-          </a:p>
-          <a:p>
-            <a:pPr>
-              <a:spcAft>
-                <a:spcPts val="300"/>
-              </a:spcAft>
-            </a:pPr>
-            <a:r>
-              <a:rPr sz="1550" b="0" i="0">
-                <a:solidFill>
-                  <a:srgbClr val="595959"/>
-                </a:solidFill>
-                <a:latin typeface="Arial"/>
-              </a:rPr>
-              <a:t>PHEQA, with the minister's decision.</a:t>
-            </a:r>
-          </a:p>
-        </p:txBody>
-      </p:sp>
-      <p:sp>
-        <p:nvSpPr>
-          <p:cNvPr id="7" name="Rectangle 6"/>
-          <p:cNvSpPr/>
-          <p:nvPr/>
-        </p:nvSpPr>
-        <p:spPr>
-          <a:xfrm>
-            <a:off x="621792" y="2767366"/>
-            <a:ext cx="10881360" cy="12700"/>
-          </a:xfrm>
-          <a:prstGeom prst="rect">
-            <a:avLst/>
-          </a:prstGeom>
-          <a:solidFill>
-            <a:srgbClr val="DDECF4"/>
-          </a:solidFill>
-          <a:ln>
-            <a:noFill/>
-          </a:ln>
-          <a:effectLst/>
-        </p:spPr>
-        <p:style>
-          <a:lnRef idx="1">
-            <a:schemeClr val="accent1"/>
-          </a:lnRef>
-          <a:fillRef idx="3">
-            <a:schemeClr val="accent1"/>
-          </a:fillRef>
-          <a:effectRef idx="2">
-            <a:schemeClr val="accent1"/>
-          </a:effectRef>
-          <a:fontRef idx="minor">
-            <a:schemeClr val="lt1"/>
-          </a:fontRef>
-        </p:style>
-        <p:txBody>
-          <a:bodyPr rtlCol="0" anchor="ctr"/>
-          <a:lstStyle/>
-          <a:p>
-            <a:pPr algn="ctr"/>
-          </a:p>
-        </p:txBody>
-      </p:sp>
-      <p:sp>
-        <p:nvSpPr>
-          <p:cNvPr id="8" name="TextBox 7"/>
-          <p:cNvSpPr txBox="1"/>
-          <p:nvPr/>
-        </p:nvSpPr>
-        <p:spPr>
-          <a:xfrm>
-            <a:off x="658368" y="2808514"/>
-            <a:ext cx="10984687" cy="627017"/>
-          </a:xfrm>
-          <a:prstGeom prst="rect">
-            <a:avLst/>
-          </a:prstGeom>
-          <a:noFill/>
-        </p:spPr>
-        <p:txBody>
-          <a:bodyPr wrap="square">
-            <a:spAutoFit/>
-          </a:bodyPr>
-          <a:lstStyle/>
-          <a:p>
-            <a:pPr>
-              <a:spcAft>
-                <a:spcPts val="300"/>
-              </a:spcAft>
-            </a:pPr>
-            <a:r>
-              <a:rPr sz="1700" b="1" i="0">
-                <a:solidFill>
-                  <a:srgbClr val="1A1A1A"/>
-                </a:solidFill>
-                <a:latin typeface="Arial"/>
-              </a:rPr>
-              <a:t>Hear an institution's appeal</a:t>
-            </a:r>
-          </a:p>
-          <a:p>
-            <a:pPr>
-              <a:spcAft>
-                <a:spcPts val="300"/>
-              </a:spcAft>
-            </a:pPr>
-            <a:r>
-              <a:rPr sz="1550" b="0" i="0">
-                <a:solidFill>
-                  <a:srgbClr val="595959"/>
-                </a:solidFill>
-                <a:latin typeface="Arial"/>
-              </a:rPr>
-              <a:t>PHEQA.</a:t>
-            </a:r>
-          </a:p>
-        </p:txBody>
-      </p:sp>
-      <p:sp>
-        <p:nvSpPr>
-          <p:cNvPr id="9" name="Rectangle 8"/>
-          <p:cNvSpPr/>
-          <p:nvPr/>
-        </p:nvSpPr>
-        <p:spPr>
-          <a:xfrm>
-            <a:off x="621792" y="3440103"/>
-            <a:ext cx="10881360" cy="12700"/>
-          </a:xfrm>
-          <a:prstGeom prst="rect">
-            <a:avLst/>
-          </a:prstGeom>
-          <a:solidFill>
-            <a:srgbClr val="DDECF4"/>
-          </a:solidFill>
-          <a:ln>
-            <a:noFill/>
-          </a:ln>
-          <a:effectLst/>
-        </p:spPr>
-        <p:style>
-          <a:lnRef idx="1">
-            <a:schemeClr val="accent1"/>
-          </a:lnRef>
-          <a:fillRef idx="3">
-            <a:schemeClr val="accent1"/>
-          </a:fillRef>
-          <a:effectRef idx="2">
-            <a:schemeClr val="accent1"/>
-          </a:effectRef>
-          <a:fontRef idx="minor">
-            <a:schemeClr val="lt1"/>
-          </a:fontRef>
-        </p:style>
-        <p:txBody>
-          <a:bodyPr rtlCol="0" anchor="ctr"/>
-          <a:lstStyle/>
-          <a:p>
-            <a:pPr algn="ctr"/>
-          </a:p>
-        </p:txBody>
-      </p:sp>
-      <p:sp>
-        <p:nvSpPr>
-          <p:cNvPr id="10" name="TextBox 9"/>
-          <p:cNvSpPr txBox="1"/>
-          <p:nvPr/>
-        </p:nvSpPr>
-        <p:spPr>
-          <a:xfrm>
-            <a:off x="658368" y="3481251"/>
-            <a:ext cx="10984687" cy="627017"/>
-          </a:xfrm>
-          <a:prstGeom prst="rect">
-            <a:avLst/>
-          </a:prstGeom>
-          <a:noFill/>
-        </p:spPr>
-        <p:txBody>
-          <a:bodyPr wrap="square">
-            <a:spAutoFit/>
-          </a:bodyPr>
-          <a:lstStyle/>
-          <a:p>
-            <a:pPr>
-              <a:spcAft>
-                <a:spcPts val="300"/>
-              </a:spcAft>
-            </a:pPr>
-            <a:r>
-              <a:rPr sz="1700" b="1" i="0">
-                <a:solidFill>
-                  <a:srgbClr val="1A1A1A"/>
-                </a:solidFill>
-                <a:latin typeface="Arial"/>
-              </a:rPr>
-              <a:t>Approve a change of name</a:t>
-            </a:r>
-          </a:p>
-          <a:p>
-            <a:pPr>
-              <a:spcAft>
-                <a:spcPts val="300"/>
-              </a:spcAft>
-            </a:pPr>
-            <a:r>
-              <a:rPr sz="1550" b="0" i="0">
-                <a:solidFill>
-                  <a:srgbClr val="595959"/>
-                </a:solidFill>
-                <a:latin typeface="Arial"/>
-              </a:rPr>
-              <a:t>MoEYS.</a:t>
-            </a:r>
-          </a:p>
-        </p:txBody>
-      </p:sp>
-      <p:sp>
-        <p:nvSpPr>
-          <p:cNvPr id="11" name="Rectangle 10"/>
-          <p:cNvSpPr/>
-          <p:nvPr/>
-        </p:nvSpPr>
-        <p:spPr>
-          <a:xfrm>
-            <a:off x="621792" y="4112840"/>
-            <a:ext cx="10881360" cy="12700"/>
-          </a:xfrm>
-          <a:prstGeom prst="rect">
-            <a:avLst/>
-          </a:prstGeom>
-          <a:solidFill>
-            <a:srgbClr val="DDECF4"/>
-          </a:solidFill>
-          <a:ln>
-            <a:noFill/>
-          </a:ln>
-          <a:effectLst/>
-        </p:spPr>
-        <p:style>
-          <a:lnRef idx="1">
-            <a:schemeClr val="accent1"/>
-          </a:lnRef>
-          <a:fillRef idx="3">
-            <a:schemeClr val="accent1"/>
-          </a:fillRef>
-          <a:effectRef idx="2">
-            <a:schemeClr val="accent1"/>
-          </a:effectRef>
-          <a:fontRef idx="minor">
-            <a:schemeClr val="lt1"/>
-          </a:fontRef>
-        </p:style>
-        <p:txBody>
-          <a:bodyPr rtlCol="0" anchor="ctr"/>
-          <a:lstStyle/>
-          <a:p>
-            <a:pPr algn="ctr"/>
-          </a:p>
-        </p:txBody>
-      </p:sp>
-      <p:sp>
-        <p:nvSpPr>
-          <p:cNvPr id="12" name="TextBox 11"/>
-          <p:cNvSpPr txBox="1"/>
-          <p:nvPr/>
-        </p:nvSpPr>
-        <p:spPr>
-          <a:xfrm>
-            <a:off x="658368" y="4153988"/>
-            <a:ext cx="10984687" cy="627017"/>
-          </a:xfrm>
-          <a:prstGeom prst="rect">
-            <a:avLst/>
-          </a:prstGeom>
-          <a:noFill/>
-        </p:spPr>
-        <p:txBody>
-          <a:bodyPr wrap="square">
-            <a:spAutoFit/>
-          </a:bodyPr>
-          <a:lstStyle/>
-          <a:p>
-            <a:pPr>
-              <a:spcAft>
-                <a:spcPts val="300"/>
-              </a:spcAft>
-            </a:pPr>
-            <a:r>
-              <a:rPr sz="1700" b="1" i="0">
-                <a:solidFill>
-                  <a:srgbClr val="1A1A1A"/>
-                </a:solidFill>
-                <a:latin typeface="Arial"/>
-              </a:rPr>
-              <a:t>Publish the list of registered institutions</a:t>
-            </a:r>
-          </a:p>
-          <a:p>
-            <a:pPr>
-              <a:spcAft>
-                <a:spcPts val="300"/>
-              </a:spcAft>
-            </a:pPr>
-            <a:r>
-              <a:rPr sz="1550" b="0" i="0">
-                <a:solidFill>
-                  <a:srgbClr val="595959"/>
-                </a:solidFill>
-                <a:latin typeface="Arial"/>
-              </a:rPr>
-              <a:t>MoEYS.</a:t>
-            </a:r>
-          </a:p>
-        </p:txBody>
-      </p:sp>
-      <p:sp>
-        <p:nvSpPr>
-          <p:cNvPr id="13" name="Rectangle 12"/>
-          <p:cNvSpPr/>
-          <p:nvPr/>
-        </p:nvSpPr>
-        <p:spPr>
-          <a:xfrm>
-            <a:off x="621792" y="4785577"/>
-            <a:ext cx="10881360" cy="12700"/>
-          </a:xfrm>
-          <a:prstGeom prst="rect">
-            <a:avLst/>
-          </a:prstGeom>
-          <a:solidFill>
-            <a:srgbClr val="DDECF4"/>
-          </a:solidFill>
-          <a:ln>
-            <a:noFill/>
-          </a:ln>
-          <a:effectLst/>
-        </p:spPr>
-        <p:style>
-          <a:lnRef idx="1">
-            <a:schemeClr val="accent1"/>
-          </a:lnRef>
-          <a:fillRef idx="3">
-            <a:schemeClr val="accent1"/>
-          </a:fillRef>
-          <a:effectRef idx="2">
-            <a:schemeClr val="accent1"/>
-          </a:effectRef>
-          <a:fontRef idx="minor">
-            <a:schemeClr val="lt1"/>
-          </a:fontRef>
-        </p:style>
-        <p:txBody>
-          <a:bodyPr rtlCol="0" anchor="ctr"/>
-          <a:lstStyle/>
-          <a:p>
-            <a:pPr algn="ctr"/>
-          </a:p>
-        </p:txBody>
-      </p:sp>
-      <p:sp>
-        <p:nvSpPr>
-          <p:cNvPr id="14" name="TextBox 13"/>
-          <p:cNvSpPr txBox="1"/>
-          <p:nvPr/>
-        </p:nvSpPr>
-        <p:spPr>
-          <a:xfrm>
-            <a:off x="658368" y="4826725"/>
-            <a:ext cx="10984687" cy="627017"/>
-          </a:xfrm>
-          <a:prstGeom prst="rect">
-            <a:avLst/>
-          </a:prstGeom>
-          <a:noFill/>
-        </p:spPr>
-        <p:txBody>
-          <a:bodyPr wrap="square">
-            <a:spAutoFit/>
-          </a:bodyPr>
-          <a:lstStyle/>
-          <a:p>
-            <a:pPr>
-              <a:spcAft>
-                <a:spcPts val="300"/>
-              </a:spcAft>
-            </a:pPr>
-            <a:r>
-              <a:rPr sz="1700" b="1" i="0">
-                <a:solidFill>
-                  <a:srgbClr val="1A1A1A"/>
-                </a:solidFill>
-                <a:latin typeface="Arial"/>
-              </a:rPr>
-              <a:t>Review a decision of PHEQA</a:t>
-            </a:r>
-          </a:p>
-          <a:p>
-            <a:pPr>
-              <a:spcAft>
-                <a:spcPts val="300"/>
-              </a:spcAft>
-            </a:pPr>
-            <a:r>
-              <a:rPr sz="1550" b="0" i="0">
-                <a:solidFill>
-                  <a:srgbClr val="595959"/>
-                </a:solidFill>
-                <a:latin typeface="Arial"/>
-              </a:rPr>
-              <a:t>MoEYS.</a:t>
-            </a:r>
-          </a:p>
-        </p:txBody>
-      </p:sp>
-      <p:sp>
-        <p:nvSpPr>
-          <p:cNvPr id="15" name="Rectangle 14"/>
-          <p:cNvSpPr/>
-          <p:nvPr/>
-        </p:nvSpPr>
-        <p:spPr>
-          <a:xfrm>
-            <a:off x="621792" y="5458314"/>
-            <a:ext cx="10881360" cy="12700"/>
-          </a:xfrm>
-          <a:prstGeom prst="rect">
-            <a:avLst/>
-          </a:prstGeom>
-          <a:solidFill>
-            <a:srgbClr val="DDECF4"/>
-          </a:solidFill>
-          <a:ln>
-            <a:noFill/>
-          </a:ln>
-          <a:effectLst/>
-        </p:spPr>
-        <p:style>
-          <a:lnRef idx="1">
-            <a:schemeClr val="accent1"/>
-          </a:lnRef>
-          <a:fillRef idx="3">
-            <a:schemeClr val="accent1"/>
-          </a:fillRef>
-          <a:effectRef idx="2">
-            <a:schemeClr val="accent1"/>
-          </a:effectRef>
-          <a:fontRef idx="minor">
-            <a:schemeClr val="lt1"/>
-          </a:fontRef>
-        </p:style>
-        <p:txBody>
-          <a:bodyPr rtlCol="0" anchor="ctr"/>
-          <a:lstStyle/>
-          <a:p>
-            <a:pPr algn="ctr"/>
-          </a:p>
-        </p:txBody>
-      </p:sp>
-      <p:sp>
-        <p:nvSpPr>
-          <p:cNvPr id="16" name="TextBox 15"/>
-          <p:cNvSpPr txBox="1"/>
-          <p:nvPr/>
-        </p:nvSpPr>
-        <p:spPr>
-          <a:xfrm>
-            <a:off x="658368" y="5499462"/>
-            <a:ext cx="10984687" cy="627017"/>
-          </a:xfrm>
-          <a:prstGeom prst="rect">
-            <a:avLst/>
-          </a:prstGeom>
-          <a:noFill/>
-        </p:spPr>
-        <p:txBody>
-          <a:bodyPr wrap="square">
-            <a:spAutoFit/>
-          </a:bodyPr>
-          <a:lstStyle/>
-          <a:p>
-            <a:pPr>
-              <a:spcAft>
-                <a:spcPts val="300"/>
-              </a:spcAft>
-            </a:pPr>
-            <a:r>
-              <a:rPr sz="1700" b="1" i="0">
-                <a:solidFill>
-                  <a:srgbClr val="1A1A1A"/>
-                </a:solidFill>
-                <a:latin typeface="Arial"/>
-              </a:rPr>
-              <a:t>Issue a learner's credential</a:t>
-            </a:r>
-          </a:p>
-          <a:p>
-            <a:pPr>
-              <a:spcAft>
-                <a:spcPts val="300"/>
-              </a:spcAft>
-            </a:pPr>
-            <a:r>
-              <a:rPr sz="1550" b="0" i="0">
-                <a:solidFill>
-                  <a:srgbClr val="595959"/>
-                </a:solidFill>
-                <a:latin typeface="Arial"/>
-              </a:rPr>
-              <a:t>PDCA, later.</a:t>
-            </a:r>
-          </a:p>
-        </p:txBody>
-      </p:sp>
-      <p:sp>
-        <p:nvSpPr>
-          <p:cNvPr id="17" name="TextBox 16"/>
+      <p:pic>
+        <p:nvPicPr>
+          <p:cNvPr id="4" name="kp4-figure F5" descr="F5_sector-catalogue.png"/>
+          <p:cNvPicPr>
+            <a:picLocks noChangeAspect="1"/>
+          </p:cNvPicPr>
+          <p:nvPr/>
+        </p:nvPicPr>
+        <p:blipFill>
+          <a:blip r:embed="rId2"/>
+          <a:stretch>
+            <a:fillRect/>
+          </a:stretch>
+        </p:blipFill>
+        <p:spPr>
+          <a:xfrm>
+            <a:off x="1758834" y="1280160"/>
+            <a:ext cx="8680426" cy="5074920"/>
+          </a:xfrm>
+          <a:prstGeom prst="rect">
+            <a:avLst/>
+          </a:prstGeom>
+        </p:spPr>
+      </p:pic>
+      <p:sp>
+        <p:nvSpPr>
+          <p:cNvPr id="5" name="TextBox 4"/>
           <p:cNvSpPr txBox="1"/>
           <p:nvPr/>
         </p:nvSpPr>
